--- a/examples/pm3_chapter_marker_numbering/chapter_marker_numbering_merged.pptx
+++ b/examples/pm3_chapter_marker_numbering/chapter_marker_numbering_merged.pptx
@@ -856,7 +856,7 @@
     </p:spTree>
     <p:extLst>
       <p:ext uri="{BB962C8B-B14F-4D97-AF65-F5344CB8AC3E}">
-        <p14:creationId xmlns:p14="http://schemas.microsoft.com/office/powerpoint/2010/main" val="47908160"/>
+        <p14:creationId xmlns:p14="http://schemas.microsoft.com/office/powerpoint/2010/main" val="4029857158"/>
       </p:ext>
     </p:extLst>
   </p:cSld>
@@ -964,7 +964,7 @@
     </p:spTree>
     <p:extLst>
       <p:ext uri="{BB962C8B-B14F-4D97-AF65-F5344CB8AC3E}">
-        <p14:creationId xmlns:p14="http://schemas.microsoft.com/office/powerpoint/2010/main" val="2476676098"/>
+        <p14:creationId xmlns:p14="http://schemas.microsoft.com/office/powerpoint/2010/main" val="4142112652"/>
       </p:ext>
     </p:extLst>
   </p:cSld>
@@ -1072,7 +1072,7 @@
     </p:spTree>
     <p:extLst>
       <p:ext uri="{BB962C8B-B14F-4D97-AF65-F5344CB8AC3E}">
-        <p14:creationId xmlns:p14="http://schemas.microsoft.com/office/powerpoint/2010/main" val="3592955640"/>
+        <p14:creationId xmlns:p14="http://schemas.microsoft.com/office/powerpoint/2010/main" val="3161216046"/>
       </p:ext>
     </p:extLst>
   </p:cSld>
@@ -1180,7 +1180,7 @@
     </p:spTree>
     <p:extLst>
       <p:ext uri="{BB962C8B-B14F-4D97-AF65-F5344CB8AC3E}">
-        <p14:creationId xmlns:p14="http://schemas.microsoft.com/office/powerpoint/2010/main" val="2555777410"/>
+        <p14:creationId xmlns:p14="http://schemas.microsoft.com/office/powerpoint/2010/main" val="418132612"/>
       </p:ext>
     </p:extLst>
   </p:cSld>
@@ -1288,7 +1288,7 @@
     </p:spTree>
     <p:extLst>
       <p:ext uri="{BB962C8B-B14F-4D97-AF65-F5344CB8AC3E}">
-        <p14:creationId xmlns:p14="http://schemas.microsoft.com/office/powerpoint/2010/main" val="2967642880"/>
+        <p14:creationId xmlns:p14="http://schemas.microsoft.com/office/powerpoint/2010/main" val="2346952331"/>
       </p:ext>
     </p:extLst>
   </p:cSld>
@@ -1396,7 +1396,7 @@
     </p:spTree>
     <p:extLst>
       <p:ext uri="{BB962C8B-B14F-4D97-AF65-F5344CB8AC3E}">
-        <p14:creationId xmlns:p14="http://schemas.microsoft.com/office/powerpoint/2010/main" val="4109264500"/>
+        <p14:creationId xmlns:p14="http://schemas.microsoft.com/office/powerpoint/2010/main" val="2002352438"/>
       </p:ext>
     </p:extLst>
   </p:cSld>
@@ -1645,7 +1645,7 @@
     </p:spTree>
     <p:extLst>
       <p:ext uri="{BB962C8B-B14F-4D97-AF65-F5344CB8AC3E}">
-        <p14:creationId xmlns:p14="http://schemas.microsoft.com/office/powerpoint/2010/main" val="3513507840"/>
+        <p14:creationId xmlns:p14="http://schemas.microsoft.com/office/powerpoint/2010/main" val="3275168379"/>
       </p:ext>
     </p:extLst>
   </p:cSld>
@@ -1878,7 +1878,7 @@
     </p:spTree>
     <p:extLst>
       <p:ext uri="{BB962C8B-B14F-4D97-AF65-F5344CB8AC3E}">
-        <p14:creationId xmlns:p14="http://schemas.microsoft.com/office/powerpoint/2010/main" val="2615731453"/>
+        <p14:creationId xmlns:p14="http://schemas.microsoft.com/office/powerpoint/2010/main" val="3272916521"/>
       </p:ext>
     </p:extLst>
   </p:cSld>
@@ -2124,7 +2124,7 @@
     </p:spTree>
     <p:extLst>
       <p:ext uri="{BB962C8B-B14F-4D97-AF65-F5344CB8AC3E}">
-        <p14:creationId xmlns:p14="http://schemas.microsoft.com/office/powerpoint/2010/main" val="766910516"/>
+        <p14:creationId xmlns:p14="http://schemas.microsoft.com/office/powerpoint/2010/main" val="4203968579"/>
       </p:ext>
     </p:extLst>
   </p:cSld>
@@ -2384,7 +2384,7 @@
     </p:spTree>
     <p:extLst>
       <p:ext uri="{BB962C8B-B14F-4D97-AF65-F5344CB8AC3E}">
-        <p14:creationId xmlns:p14="http://schemas.microsoft.com/office/powerpoint/2010/main" val="266325617"/>
+        <p14:creationId xmlns:p14="http://schemas.microsoft.com/office/powerpoint/2010/main" val="3581802838"/>
       </p:ext>
     </p:extLst>
   </p:cSld>
@@ -2649,7 +2649,7 @@
     </p:spTree>
     <p:extLst>
       <p:ext uri="{BB962C8B-B14F-4D97-AF65-F5344CB8AC3E}">
-        <p14:creationId xmlns:p14="http://schemas.microsoft.com/office/powerpoint/2010/main" val="2227538368"/>
+        <p14:creationId xmlns:p14="http://schemas.microsoft.com/office/powerpoint/2010/main" val="3179103100"/>
       </p:ext>
     </p:extLst>
   </p:cSld>
@@ -2757,7 +2757,7 @@
     </p:spTree>
     <p:extLst>
       <p:ext uri="{BB962C8B-B14F-4D97-AF65-F5344CB8AC3E}">
-        <p14:creationId xmlns:p14="http://schemas.microsoft.com/office/powerpoint/2010/main" val="4179933476"/>
+        <p14:creationId xmlns:p14="http://schemas.microsoft.com/office/powerpoint/2010/main" val="905586355"/>
       </p:ext>
     </p:extLst>
   </p:cSld>
@@ -2865,7 +2865,7 @@
     </p:spTree>
     <p:extLst>
       <p:ext uri="{BB962C8B-B14F-4D97-AF65-F5344CB8AC3E}">
-        <p14:creationId xmlns:p14="http://schemas.microsoft.com/office/powerpoint/2010/main" val="4230507121"/>
+        <p14:creationId xmlns:p14="http://schemas.microsoft.com/office/powerpoint/2010/main" val="1706741941"/>
       </p:ext>
     </p:extLst>
   </p:cSld>
@@ -2973,7 +2973,7 @@
     </p:spTree>
     <p:extLst>
       <p:ext uri="{BB962C8B-B14F-4D97-AF65-F5344CB8AC3E}">
-        <p14:creationId xmlns:p14="http://schemas.microsoft.com/office/powerpoint/2010/main" val="1429736184"/>
+        <p14:creationId xmlns:p14="http://schemas.microsoft.com/office/powerpoint/2010/main" val="2759049229"/>
       </p:ext>
     </p:extLst>
   </p:cSld>
@@ -7731,7 +7731,7 @@
     </p:spTree>
     <p:extLst>
       <p:ext uri="{BB962C8B-B14F-4D97-AF65-F5344CB8AC3E}">
-        <p14:creationId xmlns:p14="http://schemas.microsoft.com/office/powerpoint/2010/main" val="67897343"/>
+        <p14:creationId xmlns:p14="http://schemas.microsoft.com/office/powerpoint/2010/main" val="3373478791"/>
       </p:ext>
     </p:extLst>
   </p:cSld>
@@ -8161,7 +8161,7 @@
     </p:spTree>
     <p:extLst>
       <p:ext uri="{BB962C8B-B14F-4D97-AF65-F5344CB8AC3E}">
-        <p14:creationId xmlns:p14="http://schemas.microsoft.com/office/powerpoint/2010/main" val="4040783827"/>
+        <p14:creationId xmlns:p14="http://schemas.microsoft.com/office/powerpoint/2010/main" val="2926426568"/>
       </p:ext>
     </p:extLst>
   </p:cSld>
@@ -8615,7 +8615,7 @@
     </p:spTree>
     <p:extLst>
       <p:ext uri="{BB962C8B-B14F-4D97-AF65-F5344CB8AC3E}">
-        <p14:creationId xmlns:p14="http://schemas.microsoft.com/office/powerpoint/2010/main" val="560745079"/>
+        <p14:creationId xmlns:p14="http://schemas.microsoft.com/office/powerpoint/2010/main" val="2561547223"/>
       </p:ext>
     </p:extLst>
   </p:cSld>
@@ -9069,7 +9069,7 @@
     </p:spTree>
     <p:extLst>
       <p:ext uri="{BB962C8B-B14F-4D97-AF65-F5344CB8AC3E}">
-        <p14:creationId xmlns:p14="http://schemas.microsoft.com/office/powerpoint/2010/main" val="2144529427"/>
+        <p14:creationId xmlns:p14="http://schemas.microsoft.com/office/powerpoint/2010/main" val="2973106937"/>
       </p:ext>
     </p:extLst>
   </p:cSld>
@@ -9557,7 +9557,7 @@
     </p:spTree>
     <p:extLst>
       <p:ext uri="{BB962C8B-B14F-4D97-AF65-F5344CB8AC3E}">
-        <p14:creationId xmlns:p14="http://schemas.microsoft.com/office/powerpoint/2010/main" val="1613649717"/>
+        <p14:creationId xmlns:p14="http://schemas.microsoft.com/office/powerpoint/2010/main" val="1013316921"/>
       </p:ext>
     </p:extLst>
   </p:cSld>
@@ -9983,7 +9983,7 @@
     </p:spTree>
     <p:extLst>
       <p:ext uri="{BB962C8B-B14F-4D97-AF65-F5344CB8AC3E}">
-        <p14:creationId xmlns:p14="http://schemas.microsoft.com/office/powerpoint/2010/main" val="811519258"/>
+        <p14:creationId xmlns:p14="http://schemas.microsoft.com/office/powerpoint/2010/main" val="3480875514"/>
       </p:ext>
     </p:extLst>
   </p:cSld>
@@ -11658,7 +11658,7 @@
     </p:spTree>
     <p:extLst>
       <p:ext uri="{BB962C8B-B14F-4D97-AF65-F5344CB8AC3E}">
-        <p14:creationId xmlns:p14="http://schemas.microsoft.com/office/powerpoint/2010/main" val="286820519"/>
+        <p14:creationId xmlns:p14="http://schemas.microsoft.com/office/powerpoint/2010/main" val="1259800916"/>
       </p:ext>
     </p:extLst>
   </p:cSld>
@@ -14021,7 +14021,7 @@
     </p:spTree>
     <p:extLst>
       <p:ext uri="{BB962C8B-B14F-4D97-AF65-F5344CB8AC3E}">
-        <p14:creationId xmlns:p14="http://schemas.microsoft.com/office/powerpoint/2010/main" val="3233573199"/>
+        <p14:creationId xmlns:p14="http://schemas.microsoft.com/office/powerpoint/2010/main" val="751658611"/>
       </p:ext>
     </p:extLst>
   </p:cSld>
@@ -16278,7 +16278,7 @@
     </p:spTree>
     <p:extLst>
       <p:ext uri="{BB962C8B-B14F-4D97-AF65-F5344CB8AC3E}">
-        <p14:creationId xmlns:p14="http://schemas.microsoft.com/office/powerpoint/2010/main" val="2414328922"/>
+        <p14:creationId xmlns:p14="http://schemas.microsoft.com/office/powerpoint/2010/main" val="905377504"/>
       </p:ext>
     </p:extLst>
   </p:cSld>
@@ -17598,7 +17598,7 @@
     </p:spTree>
     <p:extLst>
       <p:ext uri="{BB962C8B-B14F-4D97-AF65-F5344CB8AC3E}">
-        <p14:creationId xmlns:p14="http://schemas.microsoft.com/office/powerpoint/2010/main" val="3965009135"/>
+        <p14:creationId xmlns:p14="http://schemas.microsoft.com/office/powerpoint/2010/main" val="4152473950"/>
       </p:ext>
     </p:extLst>
   </p:cSld>
@@ -18407,7 +18407,7 @@
     </p:spTree>
     <p:extLst>
       <p:ext uri="{BB962C8B-B14F-4D97-AF65-F5344CB8AC3E}">
-        <p14:creationId xmlns:p14="http://schemas.microsoft.com/office/powerpoint/2010/main" val="4104480337"/>
+        <p14:creationId xmlns:p14="http://schemas.microsoft.com/office/powerpoint/2010/main" val="4237386627"/>
       </p:ext>
     </p:extLst>
   </p:cSld>
@@ -18916,7 +18916,7 @@
     </p:spTree>
     <p:extLst>
       <p:ext uri="{BB962C8B-B14F-4D97-AF65-F5344CB8AC3E}">
-        <p14:creationId xmlns:p14="http://schemas.microsoft.com/office/powerpoint/2010/main" val="1597479758"/>
+        <p14:creationId xmlns:p14="http://schemas.microsoft.com/office/powerpoint/2010/main" val="3226080154"/>
       </p:ext>
     </p:extLst>
   </p:cSld>
@@ -19370,7 +19370,7 @@
     </p:spTree>
     <p:extLst>
       <p:ext uri="{BB962C8B-B14F-4D97-AF65-F5344CB8AC3E}">
-        <p14:creationId xmlns:p14="http://schemas.microsoft.com/office/powerpoint/2010/main" val="2184231721"/>
+        <p14:creationId xmlns:p14="http://schemas.microsoft.com/office/powerpoint/2010/main" val="987510595"/>
       </p:ext>
     </p:extLst>
   </p:cSld>
@@ -19824,7 +19824,7 @@
     </p:spTree>
     <p:extLst>
       <p:ext uri="{BB962C8B-B14F-4D97-AF65-F5344CB8AC3E}">
-        <p14:creationId xmlns:p14="http://schemas.microsoft.com/office/powerpoint/2010/main" val="125146098"/>
+        <p14:creationId xmlns:p14="http://schemas.microsoft.com/office/powerpoint/2010/main" val="4039940053"/>
       </p:ext>
     </p:extLst>
   </p:cSld>

--- a/examples/pm3_chapter_marker_numbering/chapter_marker_numbering_merged.pptx
+++ b/examples/pm3_chapter_marker_numbering/chapter_marker_numbering_merged.pptx
@@ -251,7 +251,7 @@
           <a:p>
             <a:fld id="{294670BC-B8C6-44A7-84E1-23632D8FD86F}" type="datetimeFigureOut">
               <a:rPr kumimoji="1" lang="ja-JP" altLang="en-US" smtClean="0"/>
-              <a:t>2026/6/4</a:t>
+              <a:t>2026/6/6</a:t>
             </a:fld>
             <a:endParaRPr kumimoji="1" lang="ja-JP" altLang="en-US"/>
           </a:p>
@@ -856,7 +856,7 @@
     </p:spTree>
     <p:extLst>
       <p:ext uri="{BB962C8B-B14F-4D97-AF65-F5344CB8AC3E}">
-        <p14:creationId xmlns:p14="http://schemas.microsoft.com/office/powerpoint/2010/main" val="4029857158"/>
+        <p14:creationId xmlns:p14="http://schemas.microsoft.com/office/powerpoint/2010/main" val="503858802"/>
       </p:ext>
     </p:extLst>
   </p:cSld>
@@ -964,7 +964,7 @@
     </p:spTree>
     <p:extLst>
       <p:ext uri="{BB962C8B-B14F-4D97-AF65-F5344CB8AC3E}">
-        <p14:creationId xmlns:p14="http://schemas.microsoft.com/office/powerpoint/2010/main" val="4142112652"/>
+        <p14:creationId xmlns:p14="http://schemas.microsoft.com/office/powerpoint/2010/main" val="1910608775"/>
       </p:ext>
     </p:extLst>
   </p:cSld>
@@ -1072,7 +1072,7 @@
     </p:spTree>
     <p:extLst>
       <p:ext uri="{BB962C8B-B14F-4D97-AF65-F5344CB8AC3E}">
-        <p14:creationId xmlns:p14="http://schemas.microsoft.com/office/powerpoint/2010/main" val="3161216046"/>
+        <p14:creationId xmlns:p14="http://schemas.microsoft.com/office/powerpoint/2010/main" val="1211562116"/>
       </p:ext>
     </p:extLst>
   </p:cSld>
@@ -1180,7 +1180,7 @@
     </p:spTree>
     <p:extLst>
       <p:ext uri="{BB962C8B-B14F-4D97-AF65-F5344CB8AC3E}">
-        <p14:creationId xmlns:p14="http://schemas.microsoft.com/office/powerpoint/2010/main" val="418132612"/>
+        <p14:creationId xmlns:p14="http://schemas.microsoft.com/office/powerpoint/2010/main" val="2896384252"/>
       </p:ext>
     </p:extLst>
   </p:cSld>
@@ -1288,7 +1288,7 @@
     </p:spTree>
     <p:extLst>
       <p:ext uri="{BB962C8B-B14F-4D97-AF65-F5344CB8AC3E}">
-        <p14:creationId xmlns:p14="http://schemas.microsoft.com/office/powerpoint/2010/main" val="2346952331"/>
+        <p14:creationId xmlns:p14="http://schemas.microsoft.com/office/powerpoint/2010/main" val="3573842271"/>
       </p:ext>
     </p:extLst>
   </p:cSld>
@@ -1396,7 +1396,7 @@
     </p:spTree>
     <p:extLst>
       <p:ext uri="{BB962C8B-B14F-4D97-AF65-F5344CB8AC3E}">
-        <p14:creationId xmlns:p14="http://schemas.microsoft.com/office/powerpoint/2010/main" val="2002352438"/>
+        <p14:creationId xmlns:p14="http://schemas.microsoft.com/office/powerpoint/2010/main" val="337619337"/>
       </p:ext>
     </p:extLst>
   </p:cSld>
@@ -1645,7 +1645,7 @@
     </p:spTree>
     <p:extLst>
       <p:ext uri="{BB962C8B-B14F-4D97-AF65-F5344CB8AC3E}">
-        <p14:creationId xmlns:p14="http://schemas.microsoft.com/office/powerpoint/2010/main" val="3275168379"/>
+        <p14:creationId xmlns:p14="http://schemas.microsoft.com/office/powerpoint/2010/main" val="3921050680"/>
       </p:ext>
     </p:extLst>
   </p:cSld>
@@ -1878,7 +1878,7 @@
     </p:spTree>
     <p:extLst>
       <p:ext uri="{BB962C8B-B14F-4D97-AF65-F5344CB8AC3E}">
-        <p14:creationId xmlns:p14="http://schemas.microsoft.com/office/powerpoint/2010/main" val="3272916521"/>
+        <p14:creationId xmlns:p14="http://schemas.microsoft.com/office/powerpoint/2010/main" val="2431180468"/>
       </p:ext>
     </p:extLst>
   </p:cSld>
@@ -2124,7 +2124,7 @@
     </p:spTree>
     <p:extLst>
       <p:ext uri="{BB962C8B-B14F-4D97-AF65-F5344CB8AC3E}">
-        <p14:creationId xmlns:p14="http://schemas.microsoft.com/office/powerpoint/2010/main" val="4203968579"/>
+        <p14:creationId xmlns:p14="http://schemas.microsoft.com/office/powerpoint/2010/main" val="2653989614"/>
       </p:ext>
     </p:extLst>
   </p:cSld>
@@ -2384,7 +2384,7 @@
     </p:spTree>
     <p:extLst>
       <p:ext uri="{BB962C8B-B14F-4D97-AF65-F5344CB8AC3E}">
-        <p14:creationId xmlns:p14="http://schemas.microsoft.com/office/powerpoint/2010/main" val="3581802838"/>
+        <p14:creationId xmlns:p14="http://schemas.microsoft.com/office/powerpoint/2010/main" val="836524587"/>
       </p:ext>
     </p:extLst>
   </p:cSld>
@@ -2649,7 +2649,7 @@
     </p:spTree>
     <p:extLst>
       <p:ext uri="{BB962C8B-B14F-4D97-AF65-F5344CB8AC3E}">
-        <p14:creationId xmlns:p14="http://schemas.microsoft.com/office/powerpoint/2010/main" val="3179103100"/>
+        <p14:creationId xmlns:p14="http://schemas.microsoft.com/office/powerpoint/2010/main" val="2270466782"/>
       </p:ext>
     </p:extLst>
   </p:cSld>
@@ -2757,7 +2757,7 @@
     </p:spTree>
     <p:extLst>
       <p:ext uri="{BB962C8B-B14F-4D97-AF65-F5344CB8AC3E}">
-        <p14:creationId xmlns:p14="http://schemas.microsoft.com/office/powerpoint/2010/main" val="905586355"/>
+        <p14:creationId xmlns:p14="http://schemas.microsoft.com/office/powerpoint/2010/main" val="3969420658"/>
       </p:ext>
     </p:extLst>
   </p:cSld>
@@ -2865,7 +2865,7 @@
     </p:spTree>
     <p:extLst>
       <p:ext uri="{BB962C8B-B14F-4D97-AF65-F5344CB8AC3E}">
-        <p14:creationId xmlns:p14="http://schemas.microsoft.com/office/powerpoint/2010/main" val="1706741941"/>
+        <p14:creationId xmlns:p14="http://schemas.microsoft.com/office/powerpoint/2010/main" val="85038331"/>
       </p:ext>
     </p:extLst>
   </p:cSld>
@@ -2973,7 +2973,7 @@
     </p:spTree>
     <p:extLst>
       <p:ext uri="{BB962C8B-B14F-4D97-AF65-F5344CB8AC3E}">
-        <p14:creationId xmlns:p14="http://schemas.microsoft.com/office/powerpoint/2010/main" val="2759049229"/>
+        <p14:creationId xmlns:p14="http://schemas.microsoft.com/office/powerpoint/2010/main" val="3453505432"/>
       </p:ext>
     </p:extLst>
   </p:cSld>
@@ -7731,7 +7731,7 @@
     </p:spTree>
     <p:extLst>
       <p:ext uri="{BB962C8B-B14F-4D97-AF65-F5344CB8AC3E}">
-        <p14:creationId xmlns:p14="http://schemas.microsoft.com/office/powerpoint/2010/main" val="3373478791"/>
+        <p14:creationId xmlns:p14="http://schemas.microsoft.com/office/powerpoint/2010/main" val="1008584202"/>
       </p:ext>
     </p:extLst>
   </p:cSld>
@@ -8161,7 +8161,7 @@
     </p:spTree>
     <p:extLst>
       <p:ext uri="{BB962C8B-B14F-4D97-AF65-F5344CB8AC3E}">
-        <p14:creationId xmlns:p14="http://schemas.microsoft.com/office/powerpoint/2010/main" val="2926426568"/>
+        <p14:creationId xmlns:p14="http://schemas.microsoft.com/office/powerpoint/2010/main" val="1600102638"/>
       </p:ext>
     </p:extLst>
   </p:cSld>
@@ -8615,7 +8615,7 @@
     </p:spTree>
     <p:extLst>
       <p:ext uri="{BB962C8B-B14F-4D97-AF65-F5344CB8AC3E}">
-        <p14:creationId xmlns:p14="http://schemas.microsoft.com/office/powerpoint/2010/main" val="2561547223"/>
+        <p14:creationId xmlns:p14="http://schemas.microsoft.com/office/powerpoint/2010/main" val="26732028"/>
       </p:ext>
     </p:extLst>
   </p:cSld>
@@ -9069,7 +9069,7 @@
     </p:spTree>
     <p:extLst>
       <p:ext uri="{BB962C8B-B14F-4D97-AF65-F5344CB8AC3E}">
-        <p14:creationId xmlns:p14="http://schemas.microsoft.com/office/powerpoint/2010/main" val="2973106937"/>
+        <p14:creationId xmlns:p14="http://schemas.microsoft.com/office/powerpoint/2010/main" val="394392668"/>
       </p:ext>
     </p:extLst>
   </p:cSld>
@@ -9557,7 +9557,7 @@
     </p:spTree>
     <p:extLst>
       <p:ext uri="{BB962C8B-B14F-4D97-AF65-F5344CB8AC3E}">
-        <p14:creationId xmlns:p14="http://schemas.microsoft.com/office/powerpoint/2010/main" val="1013316921"/>
+        <p14:creationId xmlns:p14="http://schemas.microsoft.com/office/powerpoint/2010/main" val="645685263"/>
       </p:ext>
     </p:extLst>
   </p:cSld>
@@ -9983,7 +9983,7 @@
     </p:spTree>
     <p:extLst>
       <p:ext uri="{BB962C8B-B14F-4D97-AF65-F5344CB8AC3E}">
-        <p14:creationId xmlns:p14="http://schemas.microsoft.com/office/powerpoint/2010/main" val="3480875514"/>
+        <p14:creationId xmlns:p14="http://schemas.microsoft.com/office/powerpoint/2010/main" val="3978677916"/>
       </p:ext>
     </p:extLst>
   </p:cSld>
@@ -11658,7 +11658,7 @@
     </p:spTree>
     <p:extLst>
       <p:ext uri="{BB962C8B-B14F-4D97-AF65-F5344CB8AC3E}">
-        <p14:creationId xmlns:p14="http://schemas.microsoft.com/office/powerpoint/2010/main" val="1259800916"/>
+        <p14:creationId xmlns:p14="http://schemas.microsoft.com/office/powerpoint/2010/main" val="1143113035"/>
       </p:ext>
     </p:extLst>
   </p:cSld>
@@ -14021,7 +14021,7 @@
     </p:spTree>
     <p:extLst>
       <p:ext uri="{BB962C8B-B14F-4D97-AF65-F5344CB8AC3E}">
-        <p14:creationId xmlns:p14="http://schemas.microsoft.com/office/powerpoint/2010/main" val="751658611"/>
+        <p14:creationId xmlns:p14="http://schemas.microsoft.com/office/powerpoint/2010/main" val="4056768336"/>
       </p:ext>
     </p:extLst>
   </p:cSld>
@@ -16278,7 +16278,7 @@
     </p:spTree>
     <p:extLst>
       <p:ext uri="{BB962C8B-B14F-4D97-AF65-F5344CB8AC3E}">
-        <p14:creationId xmlns:p14="http://schemas.microsoft.com/office/powerpoint/2010/main" val="905377504"/>
+        <p14:creationId xmlns:p14="http://schemas.microsoft.com/office/powerpoint/2010/main" val="1097745344"/>
       </p:ext>
     </p:extLst>
   </p:cSld>
@@ -17598,7 +17598,7 @@
     </p:spTree>
     <p:extLst>
       <p:ext uri="{BB962C8B-B14F-4D97-AF65-F5344CB8AC3E}">
-        <p14:creationId xmlns:p14="http://schemas.microsoft.com/office/powerpoint/2010/main" val="4152473950"/>
+        <p14:creationId xmlns:p14="http://schemas.microsoft.com/office/powerpoint/2010/main" val="3072709252"/>
       </p:ext>
     </p:extLst>
   </p:cSld>
@@ -18407,7 +18407,7 @@
     </p:spTree>
     <p:extLst>
       <p:ext uri="{BB962C8B-B14F-4D97-AF65-F5344CB8AC3E}">
-        <p14:creationId xmlns:p14="http://schemas.microsoft.com/office/powerpoint/2010/main" val="4237386627"/>
+        <p14:creationId xmlns:p14="http://schemas.microsoft.com/office/powerpoint/2010/main" val="1932500230"/>
       </p:ext>
     </p:extLst>
   </p:cSld>
@@ -18916,7 +18916,7 @@
     </p:spTree>
     <p:extLst>
       <p:ext uri="{BB962C8B-B14F-4D97-AF65-F5344CB8AC3E}">
-        <p14:creationId xmlns:p14="http://schemas.microsoft.com/office/powerpoint/2010/main" val="3226080154"/>
+        <p14:creationId xmlns:p14="http://schemas.microsoft.com/office/powerpoint/2010/main" val="3072812042"/>
       </p:ext>
     </p:extLst>
   </p:cSld>
@@ -19370,7 +19370,7 @@
     </p:spTree>
     <p:extLst>
       <p:ext uri="{BB962C8B-B14F-4D97-AF65-F5344CB8AC3E}">
-        <p14:creationId xmlns:p14="http://schemas.microsoft.com/office/powerpoint/2010/main" val="987510595"/>
+        <p14:creationId xmlns:p14="http://schemas.microsoft.com/office/powerpoint/2010/main" val="102479586"/>
       </p:ext>
     </p:extLst>
   </p:cSld>
@@ -19824,7 +19824,7 @@
     </p:spTree>
     <p:extLst>
       <p:ext uri="{BB962C8B-B14F-4D97-AF65-F5344CB8AC3E}">
-        <p14:creationId xmlns:p14="http://schemas.microsoft.com/office/powerpoint/2010/main" val="4039940053"/>
+        <p14:creationId xmlns:p14="http://schemas.microsoft.com/office/powerpoint/2010/main" val="2667381571"/>
       </p:ext>
     </p:extLst>
   </p:cSld>
